--- a/docs/reports/project-status-2026-06-23.pptx
+++ b/docs/reports/project-status-2026-06-23.pptx
@@ -6626,6 +6626,10 @@
             <a:prstDash val="solid"/>
           </a:ln>
         </p:spPr>
+        <p:txBody>
+          <a:bodyPr/>
+          <a:p/>
+        </p:txBody>
       </p:sp>
       <p:sp>
         <p:nvSpPr>
@@ -6651,6 +6655,10 @@
             <a:prstDash val="solid"/>
           </a:ln>
         </p:spPr>
+        <p:txBody>
+          <a:bodyPr/>
+          <a:p/>
+        </p:txBody>
       </p:sp>
       <p:sp>
         <p:nvSpPr>
@@ -6680,6 +6688,10 @@
             <a:prstDash val="solid"/>
           </a:ln>
         </p:spPr>
+        <p:txBody>
+          <a:bodyPr/>
+          <a:p/>
+        </p:txBody>
       </p:sp>
       <p:sp>
         <p:nvSpPr>
@@ -6709,6 +6721,10 @@
             <a:prstDash val="solid"/>
           </a:ln>
         </p:spPr>
+        <p:txBody>
+          <a:bodyPr/>
+          <a:p/>
+        </p:txBody>
       </p:sp>
       <p:sp>
         <p:nvSpPr>
@@ -6810,6 +6826,10 @@
             <a:prstDash val="solid"/>
           </a:ln>
         </p:spPr>
+        <p:txBody>
+          <a:bodyPr/>
+          <a:p/>
+        </p:txBody>
       </p:sp>
       <p:sp>
         <p:nvSpPr>
@@ -6835,6 +6855,10 @@
             <a:prstDash val="solid"/>
           </a:ln>
         </p:spPr>
+        <p:txBody>
+          <a:bodyPr/>
+          <a:p/>
+        </p:txBody>
       </p:sp>
       <p:sp>
         <p:nvSpPr>
@@ -6908,6 +6932,10 @@
             </a:outerShdw>
           </a:effectLst>
         </p:spPr>
+        <p:txBody>
+          <a:bodyPr/>
+          <a:p/>
+        </p:txBody>
       </p:sp>
       <p:sp>
         <p:nvSpPr>
@@ -6933,6 +6961,10 @@
             <a:prstDash val="solid"/>
           </a:ln>
         </p:spPr>
+        <p:txBody>
+          <a:bodyPr/>
+          <a:p/>
+        </p:txBody>
       </p:sp>
       <p:sp>
         <p:nvSpPr>
@@ -7000,34 +7032,20 @@
               <a:buNone/>
             </a:pPr>
             <a:r>
-              <a:rPr lang="en-US" sz="1350" dirty="0">
-                <a:solidFill>
-                  <a:srgbClr val="61747B"/>
-                </a:solidFill>
-                <a:latin typeface="Calibri" pitchFamily="34" charset="0"/>
-                <a:ea typeface="Calibri" pitchFamily="34" charset="-122"/>
-                <a:cs typeface="Calibri" pitchFamily="34" charset="-120"/>
+              <a:rPr sz="1100" b="1">
+                <a:latin typeface="Calibri"/>
               </a:rPr>
               <a:t>近 7 天</a:t>
             </a:r>
             <a:endParaRPr lang="en-US" sz="1350" dirty="0"/>
           </a:p>
           <a:p>
-            <a:pPr indent="0" marL="0">
-              <a:buNone/>
-            </a:pPr>
-            <a:r>
-              <a:rPr lang="en-US" sz="1350" dirty="0">
-                <a:solidFill>
-                  <a:srgbClr val="61747B"/>
-                </a:solidFill>
-                <a:latin typeface="Calibri" pitchFamily="34" charset="0"/>
-                <a:ea typeface="Calibri" pitchFamily="34" charset="-122"/>
-                <a:cs typeface="Calibri" pitchFamily="34" charset="-120"/>
-              </a:rPr>
-              <a:t>本次报告未发现过去 7 天代码变更。</a:t>
-            </a:r>
-            <a:endParaRPr lang="en-US" sz="1350" dirty="0"/>
+            <a:r>
+              <a:rPr sz="1000" b="0">
+                <a:latin typeface="Calibri"/>
+              </a:rPr>
+              <a:t>无代码变更记录。</a:t>
+            </a:r>
           </a:p>
         </p:txBody>
       </p:sp>
@@ -7055,6 +7073,10 @@
             <a:prstDash val="solid"/>
           </a:ln>
         </p:spPr>
+        <p:txBody>
+          <a:bodyPr/>
+          <a:p/>
+        </p:txBody>
       </p:sp>
       <p:sp>
         <p:nvSpPr>
@@ -7128,6 +7150,10 @@
             </a:outerShdw>
           </a:effectLst>
         </p:spPr>
+        <p:txBody>
+          <a:bodyPr/>
+          <a:p/>
+        </p:txBody>
       </p:sp>
       <p:sp>
         <p:nvSpPr>
@@ -7153,6 +7179,10 @@
             <a:prstDash val="solid"/>
           </a:ln>
         </p:spPr>
+        <p:txBody>
+          <a:bodyPr/>
+          <a:p/>
+        </p:txBody>
       </p:sp>
       <p:sp>
         <p:nvSpPr>
@@ -7220,34 +7250,20 @@
               <a:buNone/>
             </a:pPr>
             <a:r>
-              <a:rPr lang="en-US" sz="1350" dirty="0">
-                <a:solidFill>
-                  <a:srgbClr val="61747B"/>
-                </a:solidFill>
-                <a:latin typeface="Calibri" pitchFamily="34" charset="0"/>
-                <a:ea typeface="Calibri" pitchFamily="34" charset="-122"/>
-                <a:cs typeface="Calibri" pitchFamily="34" charset="-120"/>
+              <a:rPr sz="1100" b="1">
+                <a:latin typeface="Calibri"/>
               </a:rPr>
               <a:t>2025-08-26</a:t>
             </a:r>
             <a:endParaRPr lang="en-US" sz="1350" dirty="0"/>
           </a:p>
           <a:p>
-            <a:pPr indent="0" marL="0">
-              <a:buNone/>
-            </a:pPr>
-            <a:r>
-              <a:rPr lang="en-US" sz="1350" dirty="0">
-                <a:solidFill>
-                  <a:srgbClr val="61747B"/>
-                </a:solidFill>
-                <a:latin typeface="Calibri" pitchFamily="34" charset="0"/>
-                <a:ea typeface="Calibri" pitchFamily="34" charset="-122"/>
-                <a:cs typeface="Calibri" pitchFamily="34" charset="-120"/>
-              </a:rPr>
-              <a:t>新增/迁移 120 个文件，完成 user、app、ai、screenshot 等模块拆分。</a:t>
-            </a:r>
-            <a:endParaRPr lang="en-US" sz="1350" dirty="0"/>
+            <a:r>
+              <a:rPr sz="1000" b="0">
+                <a:latin typeface="Calibri"/>
+              </a:rPr>
+              <a:t>完成 user、app、ai、screenshot 等模块拆分。</a:t>
+            </a:r>
           </a:p>
         </p:txBody>
       </p:sp>
@@ -7275,6 +7291,10 @@
             <a:prstDash val="solid"/>
           </a:ln>
         </p:spPr>
+        <p:txBody>
+          <a:bodyPr/>
+          <a:p/>
+        </p:txBody>
       </p:sp>
       <p:sp>
         <p:nvSpPr>
@@ -7348,6 +7368,10 @@
             </a:outerShdw>
           </a:effectLst>
         </p:spPr>
+        <p:txBody>
+          <a:bodyPr/>
+          <a:p/>
+        </p:txBody>
       </p:sp>
       <p:sp>
         <p:nvSpPr>
@@ -7373,6 +7397,10 @@
             <a:prstDash val="solid"/>
           </a:ln>
         </p:spPr>
+        <p:txBody>
+          <a:bodyPr/>
+          <a:p/>
+        </p:txBody>
       </p:sp>
       <p:sp>
         <p:nvSpPr>
@@ -7440,34 +7468,20 @@
               <a:buNone/>
             </a:pPr>
             <a:r>
-              <a:rPr lang="en-US" sz="1350" dirty="0">
-                <a:solidFill>
-                  <a:srgbClr val="61747B"/>
-                </a:solidFill>
-                <a:latin typeface="Calibri" pitchFamily="34" charset="0"/>
-                <a:ea typeface="Calibri" pitchFamily="34" charset="-122"/>
-                <a:cs typeface="Calibri" pitchFamily="34" charset="-120"/>
+              <a:rPr sz="1100" b="1">
+                <a:latin typeface="Calibri"/>
               </a:rPr>
               <a:t>2025-08-26</a:t>
             </a:r>
             <a:endParaRPr lang="en-US" sz="1350" dirty="0"/>
           </a:p>
           <a:p>
-            <a:pPr indent="0" marL="0">
-              <a:buNone/>
-            </a:pPr>
-            <a:r>
-              <a:rPr lang="en-US" sz="1350" dirty="0">
-                <a:solidFill>
-                  <a:srgbClr val="61747B"/>
-                </a:solidFill>
-                <a:latin typeface="Calibri" pitchFamily="34" charset="0"/>
-                <a:ea typeface="Calibri" pitchFamily="34" charset="-122"/>
-                <a:cs typeface="Calibri" pitchFamily="34" charset="-120"/>
-              </a:rPr>
-              <a:t>跨服务调用、内部服务接口与应用/用户/截图服务中间态提交收束。</a:t>
-            </a:r>
-            <a:endParaRPr lang="en-US" sz="1350" dirty="0"/>
+            <a:r>
+              <a:rPr sz="1000" b="0">
+                <a:latin typeface="Calibri"/>
+              </a:rPr>
+              <a:t>Dubbo + Nacos 跨服务调用收束。</a:t>
+            </a:r>
           </a:p>
         </p:txBody>
       </p:sp>
@@ -7495,6 +7509,10 @@
             <a:prstDash val="solid"/>
           </a:ln>
         </p:spPr>
+        <p:txBody>
+          <a:bodyPr/>
+          <a:p/>
+        </p:txBody>
       </p:sp>
       <p:sp>
         <p:nvSpPr>
@@ -7568,6 +7586,10 @@
             </a:outerShdw>
           </a:effectLst>
         </p:spPr>
+        <p:txBody>
+          <a:bodyPr/>
+          <a:p/>
+        </p:txBody>
       </p:sp>
       <p:sp>
         <p:nvSpPr>
@@ -7593,6 +7615,10 @@
             <a:prstDash val="solid"/>
           </a:ln>
         </p:spPr>
+        <p:txBody>
+          <a:bodyPr/>
+          <a:p/>
+        </p:txBody>
       </p:sp>
       <p:sp>
         <p:nvSpPr>
@@ -7660,34 +7686,20 @@
               <a:buNone/>
             </a:pPr>
             <a:r>
-              <a:rPr lang="en-US" sz="1350" dirty="0">
-                <a:solidFill>
-                  <a:srgbClr val="61747B"/>
-                </a:solidFill>
-                <a:latin typeface="Calibri" pitchFamily="34" charset="0"/>
-                <a:ea typeface="Calibri" pitchFamily="34" charset="-122"/>
-                <a:cs typeface="Calibri" pitchFamily="34" charset="-120"/>
+              <a:rPr sz="1100" b="1">
+                <a:latin typeface="Calibri"/>
               </a:rPr>
               <a:t>2025-08-14</a:t>
             </a:r>
             <a:endParaRPr lang="en-US" sz="1350" dirty="0"/>
           </a:p>
           <a:p>
-            <a:pPr indent="0" marL="0">
-              <a:buNone/>
-            </a:pPr>
-            <a:r>
-              <a:rPr lang="en-US" sz="1350" dirty="0">
-                <a:solidFill>
-                  <a:srgbClr val="61747B"/>
-                </a:solidFill>
-                <a:latin typeface="Calibri" pitchFamily="34" charset="0"/>
-                <a:ea typeface="Calibri" pitchFamily="34" charset="-122"/>
-                <a:cs typeface="Calibri" pitchFamily="34" charset="-120"/>
-              </a:rPr>
-              <a:t>加入 Prometheus 暴露、Grafana 配置、AI 模型指标采集与监听器。</a:t>
-            </a:r>
-            <a:endParaRPr lang="en-US" sz="1350" dirty="0"/>
+            <a:r>
+              <a:rPr sz="1000" b="0">
+                <a:latin typeface="Calibri"/>
+              </a:rPr>
+              <a:t>加入 Prometheus、Grafana 与 AI 指标采集。</a:t>
+            </a:r>
           </a:p>
         </p:txBody>
       </p:sp>
@@ -7715,6 +7727,10 @@
             <a:prstDash val="solid"/>
           </a:ln>
         </p:spPr>
+        <p:txBody>
+          <a:bodyPr/>
+          <a:p/>
+        </p:txBody>
       </p:sp>
       <p:sp>
         <p:nvSpPr>
@@ -7788,6 +7804,10 @@
             </a:outerShdw>
           </a:effectLst>
         </p:spPr>
+        <p:txBody>
+          <a:bodyPr/>
+          <a:p/>
+        </p:txBody>
       </p:sp>
       <p:sp>
         <p:nvSpPr>
@@ -7813,6 +7833,10 @@
             <a:prstDash val="solid"/>
           </a:ln>
         </p:spPr>
+        <p:txBody>
+          <a:bodyPr/>
+          <a:p/>
+        </p:txBody>
       </p:sp>
       <p:sp>
         <p:nvSpPr>
@@ -7880,34 +7904,20 @@
               <a:buNone/>
             </a:pPr>
             <a:r>
-              <a:rPr lang="en-US" sz="1350" dirty="0">
-                <a:solidFill>
-                  <a:srgbClr val="61747B"/>
-                </a:solidFill>
-                <a:latin typeface="Calibri" pitchFamily="34" charset="0"/>
-                <a:ea typeface="Calibri" pitchFamily="34" charset="-122"/>
-                <a:cs typeface="Calibri" pitchFamily="34" charset="-120"/>
+              <a:rPr sz="1100" b="1">
+                <a:latin typeface="Calibri"/>
               </a:rPr>
               <a:t>2025-08-14</a:t>
             </a:r>
             <a:endParaRPr lang="en-US" sz="1350" dirty="0"/>
           </a:p>
           <a:p>
-            <a:pPr indent="0" marL="0">
-              <a:buNone/>
-            </a:pPr>
-            <a:r>
-              <a:rPr lang="en-US" sz="1350" dirty="0">
-                <a:solidFill>
-                  <a:srgbClr val="61747B"/>
-                </a:solidFill>
-                <a:latin typeface="Calibri" pitchFamily="34" charset="0"/>
-                <a:ea typeface="Calibri" pitchFamily="34" charset="-122"/>
-                <a:cs typeface="Calibri" pitchFamily="34" charset="-120"/>
-              </a:rPr>
-              <a:t>增加生产样例配置、前端生产环境配置与部署相关调整。</a:t>
-            </a:r>
-            <a:endParaRPr lang="en-US" sz="1350" dirty="0"/>
+            <a:r>
+              <a:rPr sz="1000" b="0">
+                <a:latin typeface="Calibri"/>
+              </a:rPr>
+              <a:t>补充生产样例与前端部署配置。</a:t>
+            </a:r>
           </a:p>
         </p:txBody>
       </p:sp>
@@ -8050,6 +8060,10 @@
             <a:prstDash val="solid"/>
           </a:ln>
         </p:spPr>
+        <p:txBody>
+          <a:bodyPr/>
+          <a:p/>
+        </p:txBody>
       </p:sp>
     </p:spTree>
   </p:cSld>
